--- a/proposals/A_why_first.pptx
+++ b/proposals/A_why_first.pptx
@@ -4783,7 +4783,7 @@
           <a:p>
             <a:r>
               <a:rPr sz="2600"/>
-              <a:t>The loop, and where the driver is queried (Lines 674 to 725)</a:t>
+              <a:t>The loop, and where the driver is queried (Lines 700 to 751)</a:t>
             </a:r>
           </a:p>
         </p:txBody>
@@ -5282,7 +5282,7 @@
           <a:p>
             <a:r>
               <a:rPr sz="2600"/>
-              <a:t>Measure it: sim time vs wall time (Lines 727 to 743)</a:t>
+              <a:t>Measure it: sim time vs wall time (Lines 753 to 769)</a:t>
             </a:r>
           </a:p>
         </p:txBody>
@@ -5793,7 +5793,7 @@
           <a:p>
             <a:r>
               <a:rPr sz="2600"/>
-              <a:t>Enforce real time, three ways (Lines 631 to 645, 71 to 88)</a:t>
+              <a:t>Enforce real time, three ways (Lines 657 to 671, 71 to 88)</a:t>
             </a:r>
           </a:p>
         </p:txBody>
@@ -6554,7 +6554,7 @@
           <a:p>
             <a:r>
               <a:rPr sz="2600"/>
-              <a:t>The keyboard, and the free gear keys (Lines 535 to 546, 589 to 592)</a:t>
+              <a:t>The keyboard, and the free gear keys (Lines 535 to 572, 589 to 592)</a:t>
             </a:r>
           </a:p>
         </p:txBody>
@@ -6612,7 +6612,7 @@
                 </a:solidFill>
                 <a:latin typeface="Consolas"/>
               </a:rPr>
-              <a:t>    # Arrow keys steer/accelerate/brake, 'C' centers steering, 'R' releases</a:t>
+              <a:t>    # W/A/S/D drive, 'C' centers steering, 'R' releases the pedals, 'L' locks</a:t>
             </a:r>
           </a:p>
           <a:p>
@@ -6623,7 +6623,7 @@
                 </a:solidFill>
                 <a:latin typeface="Consolas"/>
               </a:rPr>
-              <a:t>    # the pedals, 'L' locks the current inputs.</a:t>
+              <a:t>    # the inputs.  ARROW keys are the chase camera, not driving controls.</a:t>
             </a:r>
           </a:p>
           <a:p>
@@ -6986,7 +6986,7 @@
             <a:pPr/>
             <a:r>
               <a:rPr sz="2000"/>
-              <a:t>Driving the HMMWV with the arrow keys - watch the Irrlicht HUD (speed, inputs, RTF)</a:t>
+              <a:t>Driving the HMMWV with W/A/S/D - watch the Irrlicht HUD (speed, inputs, RTF)</a:t>
             </a:r>
           </a:p>
           <a:p>
@@ -8178,7 +8178,7 @@
           <a:p>
             <a:r>
               <a:rPr sz="2600"/>
-              <a:t>Sample once, hold, then send state back (Lines 684 to 696, 745 to 755)</a:t>
+              <a:t>Sample once, hold, then send state back (Lines 710 to 722, 745 to 755)</a:t>
             </a:r>
           </a:p>
         </p:txBody>
@@ -10404,7 +10404,7 @@
             </a:r>
             <a:r>
               <a:rPr sz="2000"/>
-              <a:t> opens an Irrlicht window with an HMMWV - drive it with the arrow keys</a:t>
+              <a:t> opens an Irrlicht window with an HMMWV - drive it with W/A/S/D</a:t>
             </a:r>
           </a:p>
           <a:p>

--- a/proposals/A_why_first.pptx
+++ b/proposals/A_why_first.pptx
@@ -6554,7 +6554,7 @@
           <a:p>
             <a:r>
               <a:rPr sz="2600"/>
-              <a:t>The keyboard, and the free gear keys (Lines 535 to 572, 589 to 592)</a:t>
+              <a:t>The keyboard, and the free gear keys (Lines 535 to 572, 615 to 618)</a:t>
             </a:r>
           </a:p>
         </p:txBody>
@@ -8178,7 +8178,7 @@
           <a:p>
             <a:r>
               <a:rPr sz="2600"/>
-              <a:t>Sample once, hold, then send state back (Lines 710 to 722, 745 to 755)</a:t>
+              <a:t>Sample once, hold, then send state back (Lines 710 to 722, 771 to 781)</a:t>
             </a:r>
           </a:p>
         </p:txBody>
